--- a/CHAPTER 4 Using LangGraph to Add Memory to Your Chatbot.pptx
+++ b/CHAPTER 4 Using LangGraph to Add Memory to Your Chatbot.pptx
@@ -270,7 +270,7 @@
                 <a:latin typeface="맑은 고딕" panose="020B0503020000020004" pitchFamily="50" charset="-127"/>
                 <a:ea typeface="맑은 고딕" panose="020B0503020000020004" pitchFamily="50" charset="-127"/>
               </a:rPr>
-              <a:t>2026-07-20</a:t>
+              <a:t>2026-07-21</a:t>
             </a:fld>
             <a:endParaRPr lang="ko-KR" altLang="en-US">
               <a:latin typeface="맑은 고딕" panose="020B0503020000020004" pitchFamily="50" charset="-127"/>
@@ -456,7 +456,7 @@
           <a:p>
             <a:fld id="{43E1C3DD-4A19-441D-907C-380838DB51C4}" type="datetime1">
               <a:rPr lang="ko-KR" altLang="en-US" noProof="0" smtClean="0"/>
-              <a:t>2026-07-20</a:t>
+              <a:t>2026-07-21</a:t>
             </a:fld>
             <a:endParaRPr lang="ko-KR" altLang="en-US" noProof="0"/>
           </a:p>
@@ -1304,7 +1304,7 @@
           <a:p>
             <a:fld id="{990475B5-67CA-4281-BDCA-DA943C3C8EB3}" type="datetime1">
               <a:rPr lang="ko-KR" altLang="en-US" noProof="0" smtClean="0"/>
-              <a:t>2026-07-20</a:t>
+              <a:t>2026-07-21</a:t>
             </a:fld>
             <a:endParaRPr lang="ko-KR" altLang="en-US" noProof="0"/>
           </a:p>
@@ -1958,7 +1958,7 @@
           <a:p>
             <a:fld id="{48A87A34-81AB-432B-8DAE-1953F412C126}" type="datetimeFigureOut">
               <a:rPr lang="en-US" smtClean="0"/>
-              <a:t>7/20/2026</a:t>
+              <a:t>7/21/2026</a:t>
             </a:fld>
             <a:endParaRPr lang="en-US" dirty="0"/>
           </a:p>
@@ -2254,7 +2254,7 @@
           <a:p>
             <a:fld id="{C655C81E-72E7-4D05-94B5-F45B321A525D}" type="datetime1">
               <a:rPr lang="ko-KR" altLang="en-US" noProof="0" smtClean="0"/>
-              <a:t>2026-07-20</a:t>
+              <a:t>2026-07-21</a:t>
             </a:fld>
             <a:endParaRPr lang="ko-KR" altLang="en-US" noProof="0" dirty="0">
               <a:latin typeface="맑은 고딕" panose="020B0503020000020004" pitchFamily="50" charset="-127"/>
@@ -5274,13 +5274,18 @@
         </p:nvSpPr>
         <p:spPr>
           <a:xfrm>
-            <a:off x="1560464" y="3639432"/>
+            <a:off x="3570239" y="3909530"/>
             <a:ext cx="6413498" cy="1677190"/>
           </a:xfrm>
           <a:prstGeom prst="rect">
             <a:avLst/>
           </a:prstGeom>
           <a:noFill/>
+          <a:ln>
+            <a:solidFill>
+              <a:schemeClr val="tx1"/>
+            </a:solidFill>
+          </a:ln>
         </p:spPr>
         <p:txBody>
           <a:bodyPr wrap="square">
@@ -5355,13 +5360,18 @@
         </p:nvSpPr>
         <p:spPr>
           <a:xfrm>
-            <a:off x="561975" y="1248422"/>
-            <a:ext cx="10982930" cy="1901161"/>
+            <a:off x="714375" y="1336457"/>
+            <a:ext cx="10763250" cy="1901161"/>
           </a:xfrm>
           <a:prstGeom prst="rect">
             <a:avLst/>
           </a:prstGeom>
           <a:noFill/>
+          <a:ln>
+            <a:solidFill>
+              <a:schemeClr val="tx1"/>
+            </a:solidFill>
+          </a:ln>
         </p:spPr>
         <p:txBody>
           <a:bodyPr wrap="square">
@@ -5510,6 +5520,51 @@
           </a:p>
         </p:txBody>
       </p:sp>
+      <p:cxnSp>
+        <p:nvCxnSpPr>
+          <p:cNvPr id="7" name="연결선: 꺾임 6">
+            <a:extLst>
+              <a:ext uri="{FF2B5EF4-FFF2-40B4-BE49-F238E27FC236}">
+                <a16:creationId xmlns:a16="http://schemas.microsoft.com/office/drawing/2014/main" id="{70D04455-5313-141E-9D59-5BE9F8D88F2E}"/>
+              </a:ext>
+            </a:extLst>
+          </p:cNvPr>
+          <p:cNvCxnSpPr>
+            <a:cxnSpLocks/>
+            <a:stCxn id="6" idx="1"/>
+            <a:endCxn id="4" idx="1"/>
+          </p:cNvCxnSpPr>
+          <p:nvPr/>
+        </p:nvCxnSpPr>
+        <p:spPr>
+          <a:xfrm rot="10800000" flipH="1" flipV="1">
+            <a:off x="714375" y="2287037"/>
+            <a:ext cx="2855864" cy="2461087"/>
+          </a:xfrm>
+          <a:prstGeom prst="bentConnector3">
+            <a:avLst>
+              <a:gd name="adj1" fmla="val -8005"/>
+            </a:avLst>
+          </a:prstGeom>
+          <a:ln>
+            <a:tailEnd type="triangle"/>
+          </a:ln>
+        </p:spPr>
+        <p:style>
+          <a:lnRef idx="1">
+            <a:schemeClr val="dk1"/>
+          </a:lnRef>
+          <a:fillRef idx="0">
+            <a:schemeClr val="dk1"/>
+          </a:fillRef>
+          <a:effectRef idx="0">
+            <a:schemeClr val="dk1"/>
+          </a:effectRef>
+          <a:fontRef idx="minor">
+            <a:schemeClr val="tx1"/>
+          </a:fontRef>
+        </p:style>
+      </p:cxnSp>
     </p:spTree>
     <p:extLst>
       <p:ext uri="{BB962C8B-B14F-4D97-AF65-F5344CB8AC3E}">
